--- a/docs/briefs/proximie.pptx
+++ b/docs/briefs/proximie.pptx
@@ -513,27 +513,27 @@
           </a:p>
           <a:p>
             <a:r>
-              <a:t>- For the 104-theatre evaluation, who owns the ground truth, and is it one shared annotated set across vendors or does each model bring its own?</a:t>
-            </a:r>
-          </a:p>
-          <a:p>
-            <a:r>
-              <a:t>- How do you currently choose which hours of the 100+ TB get annotated, and who does the annotating: clinicians, an internal team, or an outsourced workforce?</a:t>
-            </a:r>
-          </a:p>
-          <a:p>
-            <a:r>
-              <a:t>- What does the phase and instrument ontology look like today, and does it change between procedure types and trusts?</a:t>
-            </a:r>
-          </a:p>
-          <a:p>
-            <a:r>
-              <a:t>- Where does de-identification happen, edge or cloud, and would a tool that reads from your S3 without copying frames shorten the information governance conversation?</a:t>
-            </a:r>
-          </a:p>
-          <a:p>
-            <a:r>
-              <a:t>- When a model underperforms at a particular trust, how do you work out today whether it is the data, the labels, or the model?</a:t>
+              <a:t>- For the NHS pilot, how many hours of theatre video do you expect to need labelled, and who actually does the labelling today, clinicians, an outsourced team or Deloitte?</a:t>
+            </a:r>
+          </a:p>
+          <a:p>
+            <a:r>
+              <a:t>- What tool are your annotators in right now, and did you build it or buy it?</a:t>
+            </a:r>
+          </a:p>
+          <a:p>
+            <a:r>
+              <a:t>- How do you currently decide which clips get labelled next, and how much of what you label turns out to be near-identical footage?</a:t>
+            </a:r>
+          </a:p>
+          <a:p>
+            <a:r>
+              <a:t>- When a trust challenges a utilisation number, how do you show accuracy for that site and that procedure type specifically?</a:t>
+            </a:r>
+          </a:p>
+          <a:p>
+            <a:r>
+              <a:t>- Where does the de-identification step happen, on the hardware or in the cloud, and what would have to be true for a labelling platform to sit alongside your AWS environment?</a:t>
             </a:r>
           </a:p>
         </p:txBody>
@@ -613,22 +613,22 @@
           </a:p>
           <a:p>
             <a:r>
-              <a:t>- No ML or CV job ads found and $11m ARR suggests a small AI team, so they may be relying on Deloitte or AWS services (SageMaker Ground Truth, A2I) for the labelling and evaluation layer, with tooling bundled into the programme.</a:t>
-            </a:r>
-          </a:p>
-          <a:p>
-            <a:r>
-              <a:t>- NHS information governance and clinical safety review can add months even with SOC2 Type II and HIPAA, especially where any vendor touches identifiable theatre video.</a:t>
-            </a:r>
-          </a:p>
-          <a:p>
-            <a:r>
-              <a:t>- They market their own computer vision capability, so there is a build-not-buy instinct and possibly an existing internal annotation tool tied to their video player.</a:t>
-            </a:r>
-          </a:p>
-          <a:p>
-            <a:r>
-              <a:t>- No named contact and no identified AI lead; the decision may sit inside the AWS/Deloitte programme governance rather than with Proximie engineering.</a:t>
+              <a:t>- AWS and Deloitte are already in the room; labelling may be scoped into the SI contract or defaulted to SageMaker Ground Truth as part of the pilot's cloud credits.</a:t>
+            </a:r>
+          </a:p>
+          <a:p>
+            <a:r>
+              <a:t>- On-device computer vision in their hardware suggests real in-house CV capability, so they may have built their own annotation and review tooling already.</a:t>
+            </a:r>
+          </a:p>
+          <a:p>
+            <a:r>
+              <a:t>- NHS information governance on patient video could make even a bring-your-own-bucket deployment a multi-month approval, longer than the pilot window.</a:t>
+            </a:r>
+          </a:p>
+          <a:p>
+            <a:r>
+              <a:t>- Around $11m estimated ARR means tooling budget is tight and likely tied to the pilot's funding rather than a standing platform line.</a:t>
             </a:r>
           </a:p>
         </p:txBody>
@@ -3795,7 +3795,7 @@
                 </a:solidFill>
                 <a:latin typeface="Calibri"/>
               </a:rPr>
-              <a:t>Prepared 2026-09-22</a:t>
+              <a:t>Prepared 2026-09-29</a:t>
             </a:r>
           </a:p>
           <a:p>
@@ -3905,7 +3905,7 @@
                 </a:solidFill>
                 <a:latin typeface="Calibri"/>
               </a:rPr>
-              <a:t>Proximie has just committed to the largest NHS surgical AI evaluation across 104 theatres, and an evaluation programme lives or dies on curated clips, trustworthy ground truth and a defensible way to score models, which is exactly the gap Encord fills without moving a single frame of patient video.</a:t>
+              <a:t>Proximie has 100+ TB of theatre video and a new NHS/AWS/Deloitte pilot that must turn it into phase and instrument labels fast, but almost all of it is redundant footage that clinician annotators should never see.</a:t>
             </a:r>
           </a:p>
         </p:txBody>
@@ -4201,7 +4201,7 @@
                 </a:solidFill>
                 <a:latin typeface="Calibri"/>
               </a:rPr>
-              <a:t>Proximie is a cloud platform for connected operating rooms: hardware in theatre streams and records procedures, the Surgical Suite builds a video library for training and quality, and the Intelligence Suite applies computer vision to theatre workflow, throughput and utilisation. Buyers are NHS trusts and hospital groups plus 40+ medical device companies who want adoption, training and OR efficiency data. Roughly $11m ARR reported for 2025.</a:t>
+              <a:t>Proximie is an OR operating system: hardware plus cloud that records, streams and stores surgery from 500+ facilities, sold to hospital groups (NHS trusts) and 40+ medical device companies. The Intelligence Suite applies computer vision to that footage to measure throughput, utilisation and workflow; the Surgical Suite builds the video library for training and quality. Buyers pay for theatre capacity and for medtech product adoption insight.</a:t>
             </a:r>
           </a:p>
         </p:txBody>
@@ -4362,7 +4362,7 @@
                 </a:solidFill>
                 <a:latin typeface="Calibri"/>
               </a:rPr>
-              <a:t>Theatre hardware captures laparoscopic, endoscopic and room-camera feeds, with on-device computer vision doing privacy protection (their words: built-in computer vision to protect privacy) before upload. Guess: faces and out-of-body frames are blurred or dropped at the edge.</a:t>
+              <a:t>Theatre hardware captures laparoscopic feed plus room cameras, with on-device computer vision used for privacy masking before upload (stated on site).</a:t>
             </a:r>
           </a:p>
         </p:txBody>
@@ -4484,7 +4484,7 @@
                 </a:solidFill>
                 <a:latin typeface="Calibri"/>
               </a:rPr>
-              <a:t>Video lands in cloud object storage, almost certainly AWS S3 given the AWS partnership, alongside procedure metadata from the Proximie platform. 100+ TB stated on site.</a:t>
+              <a:t>Video lands in Proximie's cloud, most likely AWS S3 given the AWS pilot; roughly 100+ TB and growing (guess on volume split between room and scope video).</a:t>
             </a:r>
           </a:p>
         </p:txBody>
@@ -4606,7 +4606,7 @@
                 </a:solidFill>
                 <a:latin typeface="Calibri"/>
               </a:rPr>
-              <a:t>Clip selection for AI work is likely manual or rule-based today (by procedure type, site, surgeon). Guess: no embedding-level search or duplicate/quality filtering across the corpus.</a:t>
+              <a:t>Clips are selected for AI work by procedure type or by whoever asks, rather than by frame-level quality or diversity metrics (guess, no evidence of a curation layer).</a:t>
             </a:r>
           </a:p>
         </p:txBody>
@@ -4728,7 +4728,7 @@
                 </a:solidFill>
                 <a:latin typeface="Calibri"/>
               </a:rPr>
-              <a:t>Ground truth for surgical phase, instrument presence and workflow events is produced by clinical reviewers or an outsourced team, probably in a bespoke internal tool or a general video annotation tool. Flagged as a guess, no ML job ads found.</a:t>
+              <a:t>Labelling of surgical phase, instruments and theatre milestones is done by a mix of clinical reviewers and an outsourced vendor, possibly inside a tool built in-house or via Deloitte (guess).</a:t>
             </a:r>
           </a:p>
         </p:txBody>
@@ -4850,7 +4850,7 @@
                 </a:solidFill>
                 <a:latin typeface="Calibri"/>
               </a:rPr>
-              <a:t>Models (in-house plus third-party vendors in the NHS evaluation) are trained or fine-tuned, then scored with scripts and notebooks against held-out clips.</a:t>
+              <a:t>Models for phase recognition and utilisation timestamps are trained and evaluated offline, with aggregate accuracy reported rather than per-procedure or per-site slices (guess).</a:t>
             </a:r>
           </a:p>
         </p:txBody>
@@ -4972,7 +4972,7 @@
                 </a:solidFill>
                 <a:latin typeface="Calibri"/>
               </a:rPr>
-              <a:t>Results feed the Intelligence Suite dashboards on utilisation, turnover and throughput reported back to trusts.</a:t>
+              <a:t>Outputs feed Intelligence Suite dashboards for throughput and turnaround time at each trust.</a:t>
             </a:r>
           </a:p>
         </p:txBody>
@@ -5356,7 +5356,7 @@
                 </a:solidFill>
                 <a:latin typeface="Calibri"/>
               </a:rPr>
-              <a:t>The NHS evaluation needs a consistent, auditable ground truth and a single scoring harness across multiple AI vendors and 104 theatres, otherwise results are not comparable or defensible to trusts.</a:t>
+              <a:t>Clinician annotator time is the bottleneck. Phase and instrument labelling on long, mostly uneventful surgical video means surgeons and scrub nurses watch hours of footage to produce a few useful labels.</a:t>
             </a:r>
           </a:p>
         </p:txBody>
@@ -5434,7 +5434,7 @@
                 </a:solidFill>
                 <a:latin typeface="Calibri"/>
               </a:rPr>
-              <a:t>Sept 2026 launches with AWS, Deloitte and NHS described as the largest ever surgical AI evaluation across 104 operating theatres.</a:t>
+              <a:t>100+ TB of video and 80k recorded views on the site; the NHS pilot is framed as the largest AI theatre evaluation, so label volume steps up sharply.</a:t>
             </a:r>
           </a:p>
         </p:txBody>
@@ -5512,7 +5512,7 @@
                 </a:solidFill>
                 <a:latin typeface="Calibri"/>
               </a:rPr>
-              <a:t>Active: import each vendor's predictions, get mAP/mAR/F1, PR curves and confusion matrices on one ground truth, slice by hospital, procedure, camera or any data metric. Annotate gives the audited ground truth with sampled clinical review built into the workflow.</a:t>
+              <a:t>Index ranks frames by quality and uniqueness and clusters by embedding, so reviewers only see the diverse 30-40%. Annotate adds native video timelines, frame classifications for phase and object tracking with interpolation for instruments. Our own test cut frames to label by 61% keeping 95% of scenes.</a:t>
             </a:r>
           </a:p>
         </p:txBody>
@@ -5678,7 +5678,7 @@
                 </a:solidFill>
                 <a:latin typeface="Calibri"/>
               </a:rPr>
-              <a:t>100+ TB of surgical video is mostly redundant. Labelling clinician time is the scarce resource, so picking which minutes to annotate matters more than annotation speed.</a:t>
+              <a:t>Proving theatre capacity gains to NHS trusts needs per-site, per-procedure accuracy evidence, not a single aggregate number, and failures will cluster in poor lighting, smoke and out-of-body frames.</a:t>
             </a:r>
           </a:p>
         </p:txBody>
@@ -5756,7 +5756,7 @@
                 </a:solidFill>
                 <a:latin typeface="Calibri"/>
               </a:rPr>
-              <a:t>Site states 100+ terabytes of video, 500+ facilities, 80k recorded views; no ML job ads found, suggesting a small internal team.</a:t>
+              <a:t>The AWS and Deloitte pilot is positioned around unlocking hidden operating theatre capacity across 104+ theatres, which implies per-trust reporting and scrutiny.</a:t>
             </a:r>
           </a:p>
         </p:txBody>
@@ -5834,7 +5834,7 @@
                 </a:solidFill>
                 <a:latin typeface="Calibri"/>
               </a:rPr>
-              <a:t>Index registers the video from their own S3, generates embeddings and per-frame quality metrics, then similarity search and Collections isolate the rare phases and edge cases. Our warehouse benchmark cut frames to label by 61% and still beat a random pick of equal size.</a:t>
+              <a:t>Active imports your predictions and gives mAP, F1, PR curves and confusion matrix sliced by class, site or any data metric such as brightness and sharpness. Metric-to-failure correlation then tells you which footage to label next instead of labelling more of the same.</a:t>
             </a:r>
           </a:p>
         </p:txBody>
@@ -6000,7 +6000,7 @@
                 </a:solidFill>
                 <a:latin typeface="Calibri"/>
               </a:rPr>
-              <a:t>Patient video cannot leave their environment, and NHS information governance review will stall any tool that copies frames into a vendor cloud.</a:t>
+              <a:t>Patient and staff identifiability in room video makes any external labelling workforce or tool a governance problem, slowing IG approval with each new trust.</a:t>
             </a:r>
           </a:p>
         </p:txBody>
@@ -6078,7 +6078,7 @@
                 </a:solidFill>
                 <a:latin typeface="Calibri"/>
               </a:rPr>
-              <a:t>NHS deployment across 104 theatres; hardware page emphasises low-bandwidth and computer vision to protect privacy.</a:t>
+              <a:t>Site stresses low-bandwidth hardware with built-in computer vision to protect privacy, and the pilot runs on NHS patient data.</a:t>
             </a:r>
           </a:p>
         </p:txBody>
@@ -6156,7 +6156,7 @@
                 </a:solidFill>
                 <a:latin typeface="Calibri"/>
               </a:rPr>
-              <a:t>Encord registers data from the customer's own S3 or Azure so frames never move; SOC2 Type II, HIPAA and GDPR. Agents can run their own de-identification or phase model as a workflow stage so QA happens on already redacted frames.</a:t>
+              <a:t>Index registers data from your own AWS bucket, the files never move to us. SOC2 Type II, HIPAA and GDPR, and Agents can run your own redaction or out-of-body detector as a workflow stage so nothing identifiable reaches a human reviewer.</a:t>
             </a:r>
           </a:p>
         </p:txBody>
@@ -6566,7 +6566,7 @@
                           </a:solidFill>
                           <a:latin typeface="Calibri"/>
                         </a:rPr>
-                        <a:t>Core unit for workflow timing, turnover and throughput analytics</a:t>
+                        <a:t>Core label for workflow timing and throughput analysis across a procedure.</a:t>
                       </a:r>
                     </a:p>
                   </a:txBody>
@@ -6634,7 +6634,7 @@
                           </a:solidFill>
                           <a:latin typeface="Calibri"/>
                         </a:rPr>
-                        <a:t>Privacy gate and removes junk frames before any labelling spend</a:t>
+                        <a:t>Gates privacy risk and removes scope-out footage before human review.</a:t>
                       </a:r>
                     </a:p>
                   </a:txBody>
@@ -6658,7 +6658,7 @@
                           </a:solidFill>
                           <a:latin typeface="Calibri"/>
                         </a:rPr>
-                        <a:t>Instrument</a:t>
+                        <a:t>Surgical instrument</a:t>
                       </a:r>
                     </a:p>
                   </a:txBody>
@@ -6702,7 +6702,7 @@
                           </a:solidFill>
                           <a:latin typeface="Calibri"/>
                         </a:rPr>
-                        <a:t>Instrument presence drives phase inference and product adoption reporting</a:t>
+                        <a:t>Instrument presence and usage drives phase inference and medtech adoption metrics.</a:t>
                       </a:r>
                     </a:p>
                   </a:txBody>
@@ -6770,7 +6770,7 @@
                           </a:solidFill>
                           <a:latin typeface="Calibri"/>
                         </a:rPr>
-                        <a:t>Tip position supports dexterity and skills assessment metrics</a:t>
+                        <a:t>Tracks motion and dexterity for training and skills assessment.</a:t>
                       </a:r>
                     </a:p>
                   </a:txBody>
@@ -6794,7 +6794,7 @@
                           </a:solidFill>
                           <a:latin typeface="Calibri"/>
                         </a:rPr>
-                        <a:t>Critical anatomy (e.g. cystic duct, artery)</a:t>
+                        <a:t>Anatomy / critical structure</a:t>
                       </a:r>
                     </a:p>
                   </a:txBody>
@@ -6838,7 +6838,7 @@
                           </a:solidFill>
                           <a:latin typeface="Calibri"/>
                         </a:rPr>
-                        <a:t>Safety milestones such as critical view of safety need pixel precision</a:t>
+                        <a:t>Fine boundaries needed for critical view of safety style checks.</a:t>
                       </a:r>
                     </a:p>
                   </a:txBody>
@@ -6862,7 +6862,7 @@
                           </a:solidFill>
                           <a:latin typeface="Calibri"/>
                         </a:rPr>
-                        <a:t>Bleeding / adverse event region</a:t>
+                        <a:t>Identifiable person or screen region</a:t>
                       </a:r>
                     </a:p>
                   </a:txBody>
@@ -6884,7 +6884,7 @@
                           </a:solidFill>
                           <a:latin typeface="Calibri"/>
                         </a:rPr>
-                        <a:t>bitmask</a:t>
+                        <a:t>bounding box</a:t>
                       </a:r>
                     </a:p>
                   </a:txBody>
@@ -6906,7 +6906,7 @@
                           </a:solidFill>
                           <a:latin typeface="Calibri"/>
                         </a:rPr>
-                        <a:t>Irregular shapes, used for quality and complication review</a:t>
+                        <a:t>Validates redaction coverage for faces, badges and monitors in room video.</a:t>
                       </a:r>
                     </a:p>
                   </a:txBody>
@@ -6930,7 +6930,7 @@
                           </a:solidFill>
                           <a:latin typeface="Calibri"/>
                         </a:rPr>
-                        <a:t>Staff / person in theatre</a:t>
+                        <a:t>Adverse event (bleeding, smoke)</a:t>
                       </a:r>
                     </a:p>
                   </a:txBody>
@@ -6952,7 +6952,7 @@
                           </a:solidFill>
                           <a:latin typeface="Calibri"/>
                         </a:rPr>
-                        <a:t>bounding box</a:t>
+                        <a:t>frame classification</a:t>
                       </a:r>
                     </a:p>
                   </a:txBody>
@@ -6974,7 +6974,7 @@
                           </a:solidFill>
                           <a:latin typeface="Calibri"/>
                         </a:rPr>
-                        <a:t>Room-camera utilisation, patient-in to patient-out timings</a:t>
+                        <a:t>Rare-event mining and a known source of model failure.</a:t>
                       </a:r>
                     </a:p>
                   </a:txBody>
@@ -6998,7 +6998,7 @@
                           </a:solidFill>
                           <a:latin typeface="Calibri"/>
                         </a:rPr>
-                        <a:t>Incision or port site</a:t>
+                        <a:t>Theatre milestone (patient in, incision, closure, patient out)</a:t>
                       </a:r>
                     </a:p>
                   </a:txBody>
@@ -7020,7 +7020,7 @@
                           </a:solidFill>
                           <a:latin typeface="Calibri"/>
                         </a:rPr>
-                        <a:t>keypoint</a:t>
+                        <a:t>frame classification</a:t>
                       </a:r>
                     </a:p>
                   </a:txBody>
@@ -7042,7 +7042,7 @@
                           </a:solidFill>
                           <a:latin typeface="Calibri"/>
                         </a:rPr>
-                        <a:t>Marks procedure start and technique variation across surgeons</a:t>
+                        <a:t>Direct input to utilisation and turnaround time reporting for trusts.</a:t>
                       </a:r>
                     </a:p>
                   </a:txBody>
@@ -7597,7 +7597,7 @@
                 </a:solidFill>
                 <a:latin typeface="Calibri"/>
               </a:rPr>
-              <a:t>Active</a:t>
+              <a:t>Agents</a:t>
             </a:r>
           </a:p>
         </p:txBody>
@@ -7636,7 +7636,7 @@
                 </a:solidFill>
                 <a:latin typeface="Calibri"/>
               </a:rPr>
-              <a:t>Import predictions. Accuracy by class, site and condition. Find label errors. Know exactly what to label next.</a:t>
+              <a:t>Run your own model as a workflow stage to pre-label and QA, so people adjudicate rather than draw.</a:t>
             </a:r>
           </a:p>
         </p:txBody>
@@ -7719,7 +7719,7 @@
                 </a:solidFill>
                 <a:latin typeface="Calibri"/>
               </a:rPr>
-              <a:t>Agents</a:t>
+              <a:t>Active</a:t>
             </a:r>
           </a:p>
         </p:txBody>
@@ -7758,7 +7758,7 @@
                 </a:solidFill>
                 <a:latin typeface="Calibri"/>
               </a:rPr>
-              <a:t>Run your own model as a workflow stage to pre-label and QA, so people adjudicate rather than draw.</a:t>
+              <a:t>Import predictions. Accuracy by class, site and condition. Find label errors. Know exactly what to label next.</a:t>
             </a:r>
           </a:p>
         </p:txBody>
@@ -7963,7 +7963,7 @@
                 </a:solidFill>
                 <a:latin typeface="Calibri"/>
               </a:rPr>
-              <a:t>Harvard/MGH: annotation time reduced from days to minutes. Automotus: +20% mAP with a 35% smaller dataset and 33% lower labelling cost. Encord's own claim on high-complexity use cases: 60-80% labelling cost reduction with automation plus active learning.</a:t>
+              <a:t>Harvard/MGH: annotation time cut from days to minutes. Automotus: +20% mAP on a 35% smaller dataset with 33% lower labelling cost after curating in Encord.</a:t>
             </a:r>
           </a:p>
         </p:txBody>
@@ -8002,7 +8002,7 @@
                 </a:solidFill>
                 <a:latin typeface="Calibri"/>
               </a:rPr>
-              <a:t>Clinician time is the bottleneck in both cases. Harvard/MGH use Encord on medical imaging with automation in the annotation loop, under the same HIPAA and GDPR expectations Proximie faces with NHS trusts. Automotus is the useful second reference for the curation half of the story: fixed cameras, huge redundant footage, model accuracy driven by which frames were chosen.</a:t>
+              <a:t>Clinical experts doing the annotation, PHI-sensitive imaging, and the same problem of expert minutes being the scarce resource. For the curation side, Automotus is the closer analogue: continuous camera streams where most frames are near duplicates.</a:t>
             </a:r>
           </a:p>
         </p:txBody>
@@ -8381,7 +8381,7 @@
                 </a:solidFill>
                 <a:latin typeface="Calibri"/>
               </a:rPr>
-              <a:t>Week 0: register 200 to 500 hours of one procedure type (e.g. laparoscopic cholecystectomy) from their existing S3 bucket into Index. Nothing is copied. Success: corpus indexed with embeddings and per-frame quality metrics, plus an embedding plot Proximie has never seen of their own library.</a:t>
+              <a:t>Week 1, day 1-2: register one de-identified procedure set (target 50-100 hours of video) from Proximie's own AWS bucket in Index. No data movement. Success: embeddings and quality metrics computed, browsable by brightness, sharpness and uniqueness.</a:t>
             </a:r>
           </a:p>
         </p:txBody>
@@ -8503,7 +8503,7 @@
                 </a:solidFill>
                 <a:latin typeface="Calibri"/>
               </a:rPr>
-              <a:t>Week 1: build two Collections, one diversity-sampled training pick and one random pick of identical size, and quantify duplicate and low-quality frame rates. Success: a stated percentage of frames that can be dropped with rare phases retained.</a:t>
+              <a:t>Week 1, day 3-5: build a Collection that drops out-of-body and near-duplicate frames and samples for diversity across sites and procedure types. Success: agreed target of 50-60% reduction in frames sent to clinical reviewers while retaining 95% of distinct phases.</a:t>
             </a:r>
           </a:p>
         </p:txBody>
@@ -8625,7 +8625,7 @@
                 </a:solidFill>
                 <a:latin typeface="Calibri"/>
               </a:rPr>
-              <a:t>Week 1: stand up the phase and instrument ontology in Annotate with an annotate to clinical review workflow, SAM 3 and object tracking on for instruments and anatomy. Success: median minutes per labelled video minute versus their current baseline.</a:t>
+              <a:t>Week 2, day 1-2: stand up the phase and instrument ontology in Annotate with a review workflow, and wire an Agent running Proximie's existing phase or redaction model as a pre-labelling stage. Success: measured minutes per procedure-hour for a reviewer versus their current tool.</a:t>
             </a:r>
           </a:p>
         </p:txBody>
@@ -8747,7 +8747,7 @@
                 </a:solidFill>
                 <a:latin typeface="Calibri"/>
               </a:rPr>
-              <a:t>Week 2: import predictions from one model in the NHS evaluation into Active. Success: mAP/F1 plus confusion matrix sliced by site, camera and procedure, and a shortlist of the slices where it fails.</a:t>
+              <a:t>Week 2, day 3-4: import Proximie's current model predictions into Active and slice performance by phase, site and lighting metrics. Success: a named list of the three data slices driving most errors.</a:t>
             </a:r>
           </a:p>
         </p:txBody>
@@ -8869,7 +8869,7 @@
                 </a:solidFill>
                 <a:latin typeface="Calibri"/>
               </a:rPr>
-              <a:t>Week 2: run label validation on an existing labelled set they already trust. Success: a count of confirmed ground truth errors found, with the metric-to-failure correlation naming what to label next.</a:t>
+              <a:t>Week 2, day 5: train or fine-tune on the curated pick versus a random pick of equal size and compare. Success criterion agreed up front, for example equal or better phase accuracy on half the labelled frames.</a:t>
             </a:r>
           </a:p>
         </p:txBody>
@@ -9126,7 +9126,7 @@
                 </a:solidFill>
                 <a:latin typeface="Calibri"/>
               </a:rPr>
-              <a:t>•  For the 104-theatre evaluation, who owns the ground truth, and is it one shared annotated set across vendors or does each model bring its own?</a:t>
+              <a:t>•  For the NHS pilot, how many hours of theatre video do you expect to need labelled, and who actually does the labelling today, clinicians, an outsourced team or Deloitte?</a:t>
             </a:r>
           </a:p>
           <a:p>
@@ -9142,7 +9142,7 @@
                 </a:solidFill>
                 <a:latin typeface="Calibri"/>
               </a:rPr>
-              <a:t>•  How do you currently choose which hours of the 100+ TB get annotated, and who does the annotating: clinicians, an internal team, or an outsourced workforce?</a:t>
+              <a:t>•  What tool are your annotators in right now, and did you build it or buy it?</a:t>
             </a:r>
           </a:p>
           <a:p>
@@ -9158,7 +9158,7 @@
                 </a:solidFill>
                 <a:latin typeface="Calibri"/>
               </a:rPr>
-              <a:t>•  What does the phase and instrument ontology look like today, and does it change between procedure types and trusts?</a:t>
+              <a:t>•  How do you currently decide which clips get labelled next, and how much of what you label turns out to be near-identical footage?</a:t>
             </a:r>
           </a:p>
           <a:p>
@@ -9174,7 +9174,7 @@
                 </a:solidFill>
                 <a:latin typeface="Calibri"/>
               </a:rPr>
-              <a:t>•  Where does de-identification happen, edge or cloud, and would a tool that reads from your S3 without copying frames shorten the information governance conversation?</a:t>
+              <a:t>•  When a trust challenges a utilisation number, how do you show accuracy for that site and that procedure type specifically?</a:t>
             </a:r>
           </a:p>
           <a:p>
@@ -9190,7 +9190,7 @@
                 </a:solidFill>
                 <a:latin typeface="Calibri"/>
               </a:rPr>
-              <a:t>•  When a model underperforms at a particular trust, how do you work out today whether it is the data, the labels, or the model?</a:t>
+              <a:t>•  Where does the de-identification step happen, on the hardware or in the cloud, and what would have to be true for a labelling platform to sit alongside your AWS environment?</a:t>
             </a:r>
           </a:p>
         </p:txBody>

--- a/docs/briefs/proximie.pptx
+++ b/docs/briefs/proximie.pptx
@@ -513,27 +513,27 @@
           </a:p>
           <a:p>
             <a:r>
-              <a:t>- For the NHS pilot, how many hours of theatre video do you expect to need labelled, and who actually does the labelling today, clinicians, an outsourced team or Deloitte?</a:t>
-            </a:r>
-          </a:p>
-          <a:p>
-            <a:r>
-              <a:t>- What tool are your annotators in right now, and did you build it or buy it?</a:t>
-            </a:r>
-          </a:p>
-          <a:p>
-            <a:r>
-              <a:t>- How do you currently decide which clips get labelled next, and how much of what you label turns out to be near-identical footage?</a:t>
-            </a:r>
-          </a:p>
-          <a:p>
-            <a:r>
-              <a:t>- When a trust challenges a utilisation number, how do you show accuracy for that site and that procedure type specifically?</a:t>
-            </a:r>
-          </a:p>
-          <a:p>
-            <a:r>
-              <a:t>- Where does the de-identification step happen, on the hardware or in the cloud, and what would have to be true for a labelling platform to sit alongside your AWS environment?</a:t>
+              <a:t>- For the AWS, Deloitte and NHS evaluation, who creates the ground truth labels, and how do you currently evidence reviewer agreement and audit trail to the trusts?</a:t>
+            </a:r>
+          </a:p>
+          <a:p>
+            <a:r>
+              <a:t>- How do you decide which of the 100+ terabytes to annotate today, by procedure type, by surgeon request, or by something at frame level?</a:t>
+            </a:r>
+          </a:p>
+          <a:p>
+            <a:r>
+              <a:t>- What does a surgeon annotator actually see, an internal viewer, a vendor tool, or something like CVAT, and how many minutes per case does it take?</a:t>
+            </a:r>
+          </a:p>
+          <a:p>
+            <a:r>
+              <a:t>- When a phase or instrument model underperforms at a new site, how do you currently find out which slices are failing and what to label next?</a:t>
+            </a:r>
+          </a:p>
+          <a:p>
+            <a:r>
+              <a:t>- De-identification happens on the hardware, so what are the rules for where labelled frames can be stored and who can see them, and does data need to stay in your AWS account?</a:t>
             </a:r>
           </a:p>
         </p:txBody>
@@ -613,22 +613,22 @@
           </a:p>
           <a:p>
             <a:r>
-              <a:t>- AWS and Deloitte are already in the room; labelling may be scoped into the SI contract or defaulted to SageMaker Ground Truth as part of the pilot's cloud credits.</a:t>
-            </a:r>
-          </a:p>
-          <a:p>
-            <a:r>
-              <a:t>- On-device computer vision in their hardware suggests real in-house CV capability, so they may have built their own annotation and review tooling already.</a:t>
-            </a:r>
-          </a:p>
-          <a:p>
-            <a:r>
-              <a:t>- NHS information governance on patient video could make even a bring-your-own-bucket deployment a multi-month approval, longer than the pilot window.</a:t>
-            </a:r>
-          </a:p>
-          <a:p>
-            <a:r>
-              <a:t>- Around $11m estimated ARR means tooling budget is tight and likely tied to the pilot's funding rather than a standing platform line.</a:t>
+              <a:t>- They may have already built internal labelling tooling tied to their own player and privacy masking, making a swap feel like a step back.</a:t>
+            </a:r>
+          </a:p>
+          <a:p>
+            <a:r>
+              <a:t>- AWS and Deloitte are in the frame for the flagship evaluation, so tooling may be bundled into that engagement (SageMaker Ground Truth, Deloitte managed labelling) before we get a hearing.</a:t>
+            </a:r>
+          </a:p>
+          <a:p>
+            <a:r>
+              <a:t>- Patient data governance across NHS trusts and 50 countries can stretch procurement and information governance review well beyond a normal cycle, even with SOC2 Type II and HIPAA.</a:t>
+            </a:r>
+          </a:p>
+          <a:p>
+            <a:r>
+              <a:t>- Thin evidence on their actual ML team: no ML or CV job ads found, so AI may be a partner-delivered capability rather than an in-house build with budget.</a:t>
             </a:r>
           </a:p>
         </p:txBody>
@@ -3795,7 +3795,7 @@
                 </a:solidFill>
                 <a:latin typeface="Calibri"/>
               </a:rPr>
-              <a:t>Prepared 2026-09-29</a:t>
+              <a:t>Prepared 2026-10-06</a:t>
             </a:r>
           </a:p>
           <a:p>
@@ -3905,7 +3905,7 @@
                 </a:solidFill>
                 <a:latin typeface="Calibri"/>
               </a:rPr>
-              <a:t>Proximie has 100+ TB of theatre video and a new NHS/AWS/Deloitte pilot that must turn it into phase and instrument labels fast, but almost all of it is redundant footage that clinician annotators should never see.</a:t>
+              <a:t>Proximie has 100+ terabytes of operating theatre video and is now running a large NHS surgical AI evaluation, so the bottleneck shifts from collecting video to finding, labelling and validating the few clips that actually teach a model.</a:t>
             </a:r>
           </a:p>
         </p:txBody>
@@ -4201,7 +4201,7 @@
                 </a:solidFill>
                 <a:latin typeface="Calibri"/>
               </a:rPr>
-              <a:t>Proximie is an OR operating system: hardware plus cloud that records, streams and stores surgery from 500+ facilities, sold to hospital groups (NHS trusts) and 40+ medical device companies. The Intelligence Suite applies computer vision to that footage to measure throughput, utilisation and workflow; the Surgical Suite builds the video library for training and quality. Buyers pay for theatre capacity and for medtech product adoption insight.</a:t>
+              <a:t>Proximie sells a cloud platform and low bandwidth OR hardware that records, streams and de-identifies surgery, plus an Intelligence Suite that applies computer vision to surgical video for throughput, workflow and training analytics. Buyers are hospital groups and NHS trusts (500+ facilities, 50 countries) and 40+ medical device companies who want procedure and product usage insight. The September 2026 AWS, Deloitte and NHS surgical AI evaluation is the commercial proof point they are now selling against.</a:t>
             </a:r>
           </a:p>
         </p:txBody>
@@ -4362,7 +4362,7 @@
                 </a:solidFill>
                 <a:latin typeface="Calibri"/>
               </a:rPr>
-              <a:t>Theatre hardware captures laparoscopic feed plus room cameras, with on-device computer vision used for privacy masking before upload (stated on site).</a:t>
+              <a:t>OR hardware captures multi source video (laparoscope/endoscope feed, room cameras) with on device computer vision used for privacy masking of faces and identifiers, per their hardware page</a:t>
             </a:r>
           </a:p>
         </p:txBody>
@@ -4484,7 +4484,7 @@
                 </a:solidFill>
                 <a:latin typeface="Calibri"/>
               </a:rPr>
-              <a:t>Video lands in Proximie's cloud, most likely AWS S3 given the AWS pilot; roughly 100+ TB and growing (guess on volume split between room and scope video).</a:t>
+              <a:t>Streams and recordings land in cloud object storage, likely AWS given the announced AWS partnership, organised by facility, specialty and procedure (guess: metadata is case level, not frame level)</a:t>
             </a:r>
           </a:p>
         </p:txBody>
@@ -4606,7 +4606,7 @@
                 </a:solidFill>
                 <a:latin typeface="Calibri"/>
               </a:rPr>
-              <a:t>Clips are selected for AI work by procedure type or by whoever asks, rather than by frame-level quality or diversity metrics (guess, no evidence of a curation layer).</a:t>
+              <a:t>Clips are selected for AI work largely by clinical request or procedure type rather than by frame level quality or content search (guess, no evidence of a curation tool)</a:t>
             </a:r>
           </a:p>
         </p:txBody>
@@ -4728,7 +4728,7 @@
                 </a:solidFill>
                 <a:latin typeface="Calibri"/>
               </a:rPr>
-              <a:t>Labelling of surgical phase, instruments and theatre milestones is done by a mix of clinical reviewers and an outsourced vendor, possibly inside a tool built in-house or via Deloitte (guess).</a:t>
+              <a:t>Phase, step, instrument and critical view labelling done by clinicians or an outsourced vendor, probably in a bespoke internal viewer or a generic video tool (guess)</a:t>
             </a:r>
           </a:p>
         </p:txBody>
@@ -4850,7 +4850,7 @@
                 </a:solidFill>
                 <a:latin typeface="Calibri"/>
               </a:rPr>
-              <a:t>Models for phase recognition and utilisation timestamps are trained and evaluated offline, with aggregate accuracy reported rather than per-procedure or per-site slices (guess).</a:t>
+              <a:t>Models for phase recognition, instrument detection and timing analytics trained and reported inside the Intelligence Suite; evaluation for the AWS/Deloitte/NHS study likely needs a defensible held out, clinician adjudicated ground truth set</a:t>
             </a:r>
           </a:p>
         </p:txBody>
@@ -4972,7 +4972,7 @@
                 </a:solidFill>
                 <a:latin typeface="Calibri"/>
               </a:rPr>
-              <a:t>Outputs feed Intelligence Suite dashboards for throughput and turnaround time at each trust.</a:t>
+              <a:t>Results surfaced as throughput and workflow dashboards to hospitals and to medtech partners</a:t>
             </a:r>
           </a:p>
         </p:txBody>
@@ -5356,7 +5356,7 @@
                 </a:solidFill>
                 <a:latin typeface="Calibri"/>
               </a:rPr>
-              <a:t>Clinician annotator time is the bottleneck. Phase and instrument labelling on long, mostly uneventful surgical video means surgeons and scrub nurses watch hours of footage to produce a few useful labels.</a:t>
+              <a:t>A large multi party AI evaluation needs an auditable, clinician reviewed ground truth set across many procedures, and spreadsheet plus bespoke viewer workflows will not survive that scrutiny.</a:t>
             </a:r>
           </a:p>
         </p:txBody>
@@ -5434,7 +5434,7 @@
                 </a:solidFill>
                 <a:latin typeface="Calibri"/>
               </a:rPr>
-              <a:t>100+ TB of video and 80k recorded views on the site; the NHS pilot is framed as the largest AI theatre evaluation, so label volume steps up sharply.</a:t>
+              <a:t>Sept 2026 launch: 'largest ever surgical AI evaluation with AWS, Deloitte, and the NHS'; site claims 25+ clinical journal publications.</a:t>
             </a:r>
           </a:p>
         </p:txBody>
@@ -5512,7 +5512,7 @@
                 </a:solidFill>
                 <a:latin typeface="Calibri"/>
               </a:rPr>
-              <a:t>Index ranks frames by quality and uniqueness and clusters by embedding, so reviewers only see the diverse 30-40%. Annotate adds native video timelines, frame classifications for phase and object tracking with interpolation for instruments. Our own test cut frames to label by 61% keeping 95% of scenes.</a:t>
+              <a:t>Annotate gives native long video labelling with ontology versioning, annotate to review to complete workflows, sampled review and routing, so every frame label has a named reviewer and audit trail. Active then scores inter-reviewer disagreement and surfaces likely label errors before they reach the study report.</a:t>
             </a:r>
           </a:p>
         </p:txBody>
@@ -5678,7 +5678,7 @@
                 </a:solidFill>
                 <a:latin typeface="Calibri"/>
               </a:rPr>
-              <a:t>Proving theatre capacity gains to NHS trusts needs per-site, per-procedure accuracy evidence, not a single aggregate number, and failures will cluster in poor lighting, smoke and out-of-body frames.</a:t>
+              <a:t>Surgeon annotator time is the scarcest resource; labelling full length cases frame by frame when 90 percent of a procedure is redundant burns that time.</a:t>
             </a:r>
           </a:p>
         </p:txBody>
@@ -5756,7 +5756,7 @@
                 </a:solidFill>
                 <a:latin typeface="Calibri"/>
               </a:rPr>
-              <a:t>The AWS and Deloitte pilot is positioned around unlocking hidden operating theatre capacity across 104+ theatres, which implies per-trust reporting and scrutiny.</a:t>
+              <a:t>100+ TB of video and 80k recorded views on the site, no ML or annotation job ads found, implying a small team leaning on clinicians.</a:t>
             </a:r>
           </a:p>
         </p:txBody>
@@ -5834,7 +5834,7 @@
                 </a:solidFill>
                 <a:latin typeface="Calibri"/>
               </a:rPr>
-              <a:t>Active imports your predictions and gives mAP, F1, PR curves and confusion matrix sliced by class, site or any data metric such as brightness and sharpness. Metric-to-failure correlation then tells you which footage to label next instead of labelling more of the same.</a:t>
+              <a:t>Index registers video in their own AWS bucket (data does not move), computes embeddings and frame quality metrics, and lets them build Collections of unique, in focus, event dense segments. Our own test cut frames to label by 61 percent while keeping 95 percent of target instances.</a:t>
             </a:r>
           </a:p>
         </p:txBody>
@@ -6000,7 +6000,7 @@
                 </a:solidFill>
                 <a:latin typeface="Calibri"/>
               </a:rPr>
-              <a:t>Patient and staff identifiability in room video makes any external labelling workforce or tool a governance problem, slowing IG approval with each new trust.</a:t>
+              <a:t>Instrument and phase models trained on a few specialties degrade on new hospitals, scopes and lighting, and there is no systematic way to see which slices fail.</a:t>
             </a:r>
           </a:p>
         </p:txBody>
@@ -6078,7 +6078,7 @@
                 </a:solidFill>
                 <a:latin typeface="Calibri"/>
               </a:rPr>
-              <a:t>Site stresses low-bandwidth hardware with built-in computer vision to protect privacy, and the pilot runs on NHS patient data.</a:t>
+              <a:t>500+ facilities, 50 countries, 40+ medtech partners implies heavy site and device variation; Intelligence Suite is sold on real-time CV.</a:t>
             </a:r>
           </a:p>
         </p:txBody>
@@ -6156,7 +6156,7 @@
                 </a:solidFill>
                 <a:latin typeface="Calibri"/>
               </a:rPr>
-              <a:t>Index registers data from your own AWS bucket, the files never move to us. SOC2 Type II, HIPAA and GDPR, and Agents can run your own redaction or out-of-body detector as a workflow stage so nothing identifiable reaches a human reviewer.</a:t>
+              <a:t>Active imports their predictions and reports mAP/F1, PR curves and confusion matrix sliced by class, IoU threshold and any data metric such as brightness or sharpness, then correlates failure to data metrics so they know which cases to label next.</a:t>
             </a:r>
           </a:p>
         </p:txBody>
@@ -6522,7 +6522,7 @@
                           </a:solidFill>
                           <a:latin typeface="Calibri"/>
                         </a:rPr>
-                        <a:t>Surgical phase</a:t>
+                        <a:t>Surgical phase / step</a:t>
                       </a:r>
                     </a:p>
                   </a:txBody>
@@ -6566,7 +6566,7 @@
                           </a:solidFill>
                           <a:latin typeface="Calibri"/>
                         </a:rPr>
-                        <a:t>Core label for workflow timing and throughput analysis across a procedure.</a:t>
+                        <a:t>Core timing and throughput signal; phases are temporal spans, not objects.</a:t>
                       </a:r>
                     </a:p>
                   </a:txBody>
@@ -6590,7 +6590,415 @@
                           </a:solidFill>
                           <a:latin typeface="Calibri"/>
                         </a:rPr>
-                        <a:t>Out-of-body / non-clinical frame</a:t>
+                        <a:t>Instrument tip and shaft</a:t>
+                      </a:r>
+                    </a:p>
+                  </a:txBody>
+                  <a:tcPr>
+                    <a:solidFill>
+                      <a:srgbClr val="EEEDFB"/>
+                    </a:solidFill>
+                  </a:tcPr>
+                </a:tc>
+                <a:tc>
+                  <a:txBody>
+                    <a:bodyPr/>
+                    <a:lstStyle/>
+                    <a:p>
+                      <a:r>
+                        <a:rPr sz="1050" b="0">
+                          <a:solidFill>
+                            <a:srgbClr val="171A33"/>
+                          </a:solidFill>
+                          <a:latin typeface="Calibri"/>
+                        </a:rPr>
+                        <a:t>polyline</a:t>
+                      </a:r>
+                    </a:p>
+                  </a:txBody>
+                  <a:tcPr>
+                    <a:solidFill>
+                      <a:srgbClr val="EEEDFB"/>
+                    </a:solidFill>
+                  </a:tcPr>
+                </a:tc>
+                <a:tc>
+                  <a:txBody>
+                    <a:bodyPr/>
+                    <a:lstStyle/>
+                    <a:p>
+                      <a:r>
+                        <a:rPr sz="1050" b="0">
+                          <a:solidFill>
+                            <a:srgbClr val="171A33"/>
+                          </a:solidFill>
+                          <a:latin typeface="Calibri"/>
+                        </a:rPr>
+                        <a:t>Captures tool trajectory and economy of motion better than a box.</a:t>
+                      </a:r>
+                    </a:p>
+                  </a:txBody>
+                  <a:tcPr>
+                    <a:solidFill>
+                      <a:srgbClr val="EEEDFB"/>
+                    </a:solidFill>
+                  </a:tcPr>
+                </a:tc>
+              </a:tr>
+              <a:tr h="365760">
+                <a:tc>
+                  <a:txBody>
+                    <a:bodyPr/>
+                    <a:lstStyle/>
+                    <a:p>
+                      <a:r>
+                        <a:rPr sz="1050" b="1">
+                          <a:solidFill>
+                            <a:srgbClr val="171A33"/>
+                          </a:solidFill>
+                          <a:latin typeface="Calibri"/>
+                        </a:rPr>
+                        <a:t>Instrument instance</a:t>
+                      </a:r>
+                    </a:p>
+                  </a:txBody>
+                  <a:tcPr>
+                    <a:solidFill>
+                      <a:srgbClr val="FFFFFF"/>
+                    </a:solidFill>
+                  </a:tcPr>
+                </a:tc>
+                <a:tc>
+                  <a:txBody>
+                    <a:bodyPr/>
+                    <a:lstStyle/>
+                    <a:p>
+                      <a:r>
+                        <a:rPr sz="1050" b="0">
+                          <a:solidFill>
+                            <a:srgbClr val="171A33"/>
+                          </a:solidFill>
+                          <a:latin typeface="Calibri"/>
+                        </a:rPr>
+                        <a:t>bounding box</a:t>
+                      </a:r>
+                    </a:p>
+                  </a:txBody>
+                  <a:tcPr>
+                    <a:solidFill>
+                      <a:srgbClr val="FFFFFF"/>
+                    </a:solidFill>
+                  </a:tcPr>
+                </a:tc>
+                <a:tc>
+                  <a:txBody>
+                    <a:bodyPr/>
+                    <a:lstStyle/>
+                    <a:p>
+                      <a:r>
+                        <a:rPr sz="1050" b="0">
+                          <a:solidFill>
+                            <a:srgbClr val="171A33"/>
+                          </a:solidFill>
+                          <a:latin typeface="Calibri"/>
+                        </a:rPr>
+                        <a:t>Fast, trackable across video for tool presence, counts and usage analytics.</a:t>
+                      </a:r>
+                    </a:p>
+                  </a:txBody>
+                  <a:tcPr>
+                    <a:solidFill>
+                      <a:srgbClr val="FFFFFF"/>
+                    </a:solidFill>
+                  </a:tcPr>
+                </a:tc>
+              </a:tr>
+              <a:tr h="365760">
+                <a:tc>
+                  <a:txBody>
+                    <a:bodyPr/>
+                    <a:lstStyle/>
+                    <a:p>
+                      <a:r>
+                        <a:rPr sz="1050" b="1">
+                          <a:solidFill>
+                            <a:srgbClr val="171A33"/>
+                          </a:solidFill>
+                          <a:latin typeface="Calibri"/>
+                        </a:rPr>
+                        <a:t>Anatomy / target organ</a:t>
+                      </a:r>
+                    </a:p>
+                  </a:txBody>
+                  <a:tcPr>
+                    <a:solidFill>
+                      <a:srgbClr val="EEEDFB"/>
+                    </a:solidFill>
+                  </a:tcPr>
+                </a:tc>
+                <a:tc>
+                  <a:txBody>
+                    <a:bodyPr/>
+                    <a:lstStyle/>
+                    <a:p>
+                      <a:r>
+                        <a:rPr sz="1050" b="0">
+                          <a:solidFill>
+                            <a:srgbClr val="171A33"/>
+                          </a:solidFill>
+                          <a:latin typeface="Calibri"/>
+                        </a:rPr>
+                        <a:t>bitmask</a:t>
+                      </a:r>
+                    </a:p>
+                  </a:txBody>
+                  <a:tcPr>
+                    <a:solidFill>
+                      <a:srgbClr val="EEEDFB"/>
+                    </a:solidFill>
+                  </a:tcPr>
+                </a:tc>
+                <a:tc>
+                  <a:txBody>
+                    <a:bodyPr/>
+                    <a:lstStyle/>
+                    <a:p>
+                      <a:r>
+                        <a:rPr sz="1050" b="0">
+                          <a:solidFill>
+                            <a:srgbClr val="171A33"/>
+                          </a:solidFill>
+                          <a:latin typeface="Calibri"/>
+                        </a:rPr>
+                        <a:t>Irregular soft tissue boundaries; SAM 3 auto-segmentation suits this well.</a:t>
+                      </a:r>
+                    </a:p>
+                  </a:txBody>
+                  <a:tcPr>
+                    <a:solidFill>
+                      <a:srgbClr val="EEEDFB"/>
+                    </a:solidFill>
+                  </a:tcPr>
+                </a:tc>
+              </a:tr>
+              <a:tr h="365760">
+                <a:tc>
+                  <a:txBody>
+                    <a:bodyPr/>
+                    <a:lstStyle/>
+                    <a:p>
+                      <a:r>
+                        <a:rPr sz="1050" b="1">
+                          <a:solidFill>
+                            <a:srgbClr val="171A33"/>
+                          </a:solidFill>
+                          <a:latin typeface="Calibri"/>
+                        </a:rPr>
+                        <a:t>Critical view / safety landmark</a:t>
+                      </a:r>
+                    </a:p>
+                  </a:txBody>
+                  <a:tcPr>
+                    <a:solidFill>
+                      <a:srgbClr val="FFFFFF"/>
+                    </a:solidFill>
+                  </a:tcPr>
+                </a:tc>
+                <a:tc>
+                  <a:txBody>
+                    <a:bodyPr/>
+                    <a:lstStyle/>
+                    <a:p>
+                      <a:r>
+                        <a:rPr sz="1050" b="0">
+                          <a:solidFill>
+                            <a:srgbClr val="171A33"/>
+                          </a:solidFill>
+                          <a:latin typeface="Calibri"/>
+                        </a:rPr>
+                        <a:t>polygon</a:t>
+                      </a:r>
+                    </a:p>
+                  </a:txBody>
+                  <a:tcPr>
+                    <a:solidFill>
+                      <a:srgbClr val="FFFFFF"/>
+                    </a:solidFill>
+                  </a:tcPr>
+                </a:tc>
+                <a:tc>
+                  <a:txBody>
+                    <a:bodyPr/>
+                    <a:lstStyle/>
+                    <a:p>
+                      <a:r>
+                        <a:rPr sz="1050" b="0">
+                          <a:solidFill>
+                            <a:srgbClr val="171A33"/>
+                          </a:solidFill>
+                          <a:latin typeface="Calibri"/>
+                        </a:rPr>
+                        <a:t>Clinically defined region used in quality and training scoring.</a:t>
+                      </a:r>
+                    </a:p>
+                  </a:txBody>
+                  <a:tcPr>
+                    <a:solidFill>
+                      <a:srgbClr val="FFFFFF"/>
+                    </a:solidFill>
+                  </a:tcPr>
+                </a:tc>
+              </a:tr>
+              <a:tr h="365760">
+                <a:tc>
+                  <a:txBody>
+                    <a:bodyPr/>
+                    <a:lstStyle/>
+                    <a:p>
+                      <a:r>
+                        <a:rPr sz="1050" b="1">
+                          <a:solidFill>
+                            <a:srgbClr val="171A33"/>
+                          </a:solidFill>
+                          <a:latin typeface="Calibri"/>
+                        </a:rPr>
+                        <a:t>Implant or device under evaluation</a:t>
+                      </a:r>
+                    </a:p>
+                  </a:txBody>
+                  <a:tcPr>
+                    <a:solidFill>
+                      <a:srgbClr val="EEEDFB"/>
+                    </a:solidFill>
+                  </a:tcPr>
+                </a:tc>
+                <a:tc>
+                  <a:txBody>
+                    <a:bodyPr/>
+                    <a:lstStyle/>
+                    <a:p>
+                      <a:r>
+                        <a:rPr sz="1050" b="0">
+                          <a:solidFill>
+                            <a:srgbClr val="171A33"/>
+                          </a:solidFill>
+                          <a:latin typeface="Calibri"/>
+                        </a:rPr>
+                        <a:t>bounding box</a:t>
+                      </a:r>
+                    </a:p>
+                  </a:txBody>
+                  <a:tcPr>
+                    <a:solidFill>
+                      <a:srgbClr val="EEEDFB"/>
+                    </a:solidFill>
+                  </a:tcPr>
+                </a:tc>
+                <a:tc>
+                  <a:txBody>
+                    <a:bodyPr/>
+                    <a:lstStyle/>
+                    <a:p>
+                      <a:r>
+                        <a:rPr sz="1050" b="0">
+                          <a:solidFill>
+                            <a:srgbClr val="171A33"/>
+                          </a:solidFill>
+                          <a:latin typeface="Calibri"/>
+                        </a:rPr>
+                        <a:t>Medtech partners pay for product usage and adoption evidence.</a:t>
+                      </a:r>
+                    </a:p>
+                  </a:txBody>
+                  <a:tcPr>
+                    <a:solidFill>
+                      <a:srgbClr val="EEEDFB"/>
+                    </a:solidFill>
+                  </a:tcPr>
+                </a:tc>
+              </a:tr>
+              <a:tr h="365760">
+                <a:tc>
+                  <a:txBody>
+                    <a:bodyPr/>
+                    <a:lstStyle/>
+                    <a:p>
+                      <a:r>
+                        <a:rPr sz="1050" b="1">
+                          <a:solidFill>
+                            <a:srgbClr val="171A33"/>
+                          </a:solidFill>
+                          <a:latin typeface="Calibri"/>
+                        </a:rPr>
+                        <a:t>Bleeding or adverse event</a:t>
+                      </a:r>
+                    </a:p>
+                  </a:txBody>
+                  <a:tcPr>
+                    <a:solidFill>
+                      <a:srgbClr val="FFFFFF"/>
+                    </a:solidFill>
+                  </a:tcPr>
+                </a:tc>
+                <a:tc>
+                  <a:txBody>
+                    <a:bodyPr/>
+                    <a:lstStyle/>
+                    <a:p>
+                      <a:r>
+                        <a:rPr sz="1050" b="0">
+                          <a:solidFill>
+                            <a:srgbClr val="171A33"/>
+                          </a:solidFill>
+                          <a:latin typeface="Calibri"/>
+                        </a:rPr>
+                        <a:t>frame classification</a:t>
+                      </a:r>
+                    </a:p>
+                  </a:txBody>
+                  <a:tcPr>
+                    <a:solidFill>
+                      <a:srgbClr val="FFFFFF"/>
+                    </a:solidFill>
+                  </a:tcPr>
+                </a:tc>
+                <a:tc>
+                  <a:txBody>
+                    <a:bodyPr/>
+                    <a:lstStyle/>
+                    <a:p>
+                      <a:r>
+                        <a:rPr sz="1050" b="0">
+                          <a:solidFill>
+                            <a:srgbClr val="171A33"/>
+                          </a:solidFill>
+                          <a:latin typeface="Calibri"/>
+                        </a:rPr>
+                        <a:t>Rare event flag for retrieval and for safety reporting in the NHS study.</a:t>
+                      </a:r>
+                    </a:p>
+                  </a:txBody>
+                  <a:tcPr>
+                    <a:solidFill>
+                      <a:srgbClr val="FFFFFF"/>
+                    </a:solidFill>
+                  </a:tcPr>
+                </a:tc>
+              </a:tr>
+              <a:tr h="365760">
+                <a:tc>
+                  <a:txBody>
+                    <a:bodyPr/>
+                    <a:lstStyle/>
+                    <a:p>
+                      <a:r>
+                        <a:rPr sz="1050" b="1">
+                          <a:solidFill>
+                            <a:srgbClr val="171A33"/>
+                          </a:solidFill>
+                          <a:latin typeface="Calibri"/>
+                        </a:rPr>
+                        <a:t>Out of body / privacy risk frame</a:t>
                       </a:r>
                     </a:p>
                   </a:txBody>
@@ -6634,415 +7042,7 @@
                           </a:solidFill>
                           <a:latin typeface="Calibri"/>
                         </a:rPr>
-                        <a:t>Gates privacy risk and removes scope-out footage before human review.</a:t>
-                      </a:r>
-                    </a:p>
-                  </a:txBody>
-                  <a:tcPr>
-                    <a:solidFill>
-                      <a:srgbClr val="EEEDFB"/>
-                    </a:solidFill>
-                  </a:tcPr>
-                </a:tc>
-              </a:tr>
-              <a:tr h="365760">
-                <a:tc>
-                  <a:txBody>
-                    <a:bodyPr/>
-                    <a:lstStyle/>
-                    <a:p>
-                      <a:r>
-                        <a:rPr sz="1050" b="1">
-                          <a:solidFill>
-                            <a:srgbClr val="171A33"/>
-                          </a:solidFill>
-                          <a:latin typeface="Calibri"/>
-                        </a:rPr>
-                        <a:t>Surgical instrument</a:t>
-                      </a:r>
-                    </a:p>
-                  </a:txBody>
-                  <a:tcPr>
-                    <a:solidFill>
-                      <a:srgbClr val="FFFFFF"/>
-                    </a:solidFill>
-                  </a:tcPr>
-                </a:tc>
-                <a:tc>
-                  <a:txBody>
-                    <a:bodyPr/>
-                    <a:lstStyle/>
-                    <a:p>
-                      <a:r>
-                        <a:rPr sz="1050" b="0">
-                          <a:solidFill>
-                            <a:srgbClr val="171A33"/>
-                          </a:solidFill>
-                          <a:latin typeface="Calibri"/>
-                        </a:rPr>
-                        <a:t>bounding box</a:t>
-                      </a:r>
-                    </a:p>
-                  </a:txBody>
-                  <a:tcPr>
-                    <a:solidFill>
-                      <a:srgbClr val="FFFFFF"/>
-                    </a:solidFill>
-                  </a:tcPr>
-                </a:tc>
-                <a:tc>
-                  <a:txBody>
-                    <a:bodyPr/>
-                    <a:lstStyle/>
-                    <a:p>
-                      <a:r>
-                        <a:rPr sz="1050" b="0">
-                          <a:solidFill>
-                            <a:srgbClr val="171A33"/>
-                          </a:solidFill>
-                          <a:latin typeface="Calibri"/>
-                        </a:rPr>
-                        <a:t>Instrument presence and usage drives phase inference and medtech adoption metrics.</a:t>
-                      </a:r>
-                    </a:p>
-                  </a:txBody>
-                  <a:tcPr>
-                    <a:solidFill>
-                      <a:srgbClr val="FFFFFF"/>
-                    </a:solidFill>
-                  </a:tcPr>
-                </a:tc>
-              </a:tr>
-              <a:tr h="365760">
-                <a:tc>
-                  <a:txBody>
-                    <a:bodyPr/>
-                    <a:lstStyle/>
-                    <a:p>
-                      <a:r>
-                        <a:rPr sz="1050" b="1">
-                          <a:solidFill>
-                            <a:srgbClr val="171A33"/>
-                          </a:solidFill>
-                          <a:latin typeface="Calibri"/>
-                        </a:rPr>
-                        <a:t>Instrument tip</a:t>
-                      </a:r>
-                    </a:p>
-                  </a:txBody>
-                  <a:tcPr>
-                    <a:solidFill>
-                      <a:srgbClr val="EEEDFB"/>
-                    </a:solidFill>
-                  </a:tcPr>
-                </a:tc>
-                <a:tc>
-                  <a:txBody>
-                    <a:bodyPr/>
-                    <a:lstStyle/>
-                    <a:p>
-                      <a:r>
-                        <a:rPr sz="1050" b="0">
-                          <a:solidFill>
-                            <a:srgbClr val="171A33"/>
-                          </a:solidFill>
-                          <a:latin typeface="Calibri"/>
-                        </a:rPr>
-                        <a:t>keypoint</a:t>
-                      </a:r>
-                    </a:p>
-                  </a:txBody>
-                  <a:tcPr>
-                    <a:solidFill>
-                      <a:srgbClr val="EEEDFB"/>
-                    </a:solidFill>
-                  </a:tcPr>
-                </a:tc>
-                <a:tc>
-                  <a:txBody>
-                    <a:bodyPr/>
-                    <a:lstStyle/>
-                    <a:p>
-                      <a:r>
-                        <a:rPr sz="1050" b="0">
-                          <a:solidFill>
-                            <a:srgbClr val="171A33"/>
-                          </a:solidFill>
-                          <a:latin typeface="Calibri"/>
-                        </a:rPr>
-                        <a:t>Tracks motion and dexterity for training and skills assessment.</a:t>
-                      </a:r>
-                    </a:p>
-                  </a:txBody>
-                  <a:tcPr>
-                    <a:solidFill>
-                      <a:srgbClr val="EEEDFB"/>
-                    </a:solidFill>
-                  </a:tcPr>
-                </a:tc>
-              </a:tr>
-              <a:tr h="365760">
-                <a:tc>
-                  <a:txBody>
-                    <a:bodyPr/>
-                    <a:lstStyle/>
-                    <a:p>
-                      <a:r>
-                        <a:rPr sz="1050" b="1">
-                          <a:solidFill>
-                            <a:srgbClr val="171A33"/>
-                          </a:solidFill>
-                          <a:latin typeface="Calibri"/>
-                        </a:rPr>
-                        <a:t>Anatomy / critical structure</a:t>
-                      </a:r>
-                    </a:p>
-                  </a:txBody>
-                  <a:tcPr>
-                    <a:solidFill>
-                      <a:srgbClr val="FFFFFF"/>
-                    </a:solidFill>
-                  </a:tcPr>
-                </a:tc>
-                <a:tc>
-                  <a:txBody>
-                    <a:bodyPr/>
-                    <a:lstStyle/>
-                    <a:p>
-                      <a:r>
-                        <a:rPr sz="1050" b="0">
-                          <a:solidFill>
-                            <a:srgbClr val="171A33"/>
-                          </a:solidFill>
-                          <a:latin typeface="Calibri"/>
-                        </a:rPr>
-                        <a:t>bitmask</a:t>
-                      </a:r>
-                    </a:p>
-                  </a:txBody>
-                  <a:tcPr>
-                    <a:solidFill>
-                      <a:srgbClr val="FFFFFF"/>
-                    </a:solidFill>
-                  </a:tcPr>
-                </a:tc>
-                <a:tc>
-                  <a:txBody>
-                    <a:bodyPr/>
-                    <a:lstStyle/>
-                    <a:p>
-                      <a:r>
-                        <a:rPr sz="1050" b="0">
-                          <a:solidFill>
-                            <a:srgbClr val="171A33"/>
-                          </a:solidFill>
-                          <a:latin typeface="Calibri"/>
-                        </a:rPr>
-                        <a:t>Fine boundaries needed for critical view of safety style checks.</a:t>
-                      </a:r>
-                    </a:p>
-                  </a:txBody>
-                  <a:tcPr>
-                    <a:solidFill>
-                      <a:srgbClr val="FFFFFF"/>
-                    </a:solidFill>
-                  </a:tcPr>
-                </a:tc>
-              </a:tr>
-              <a:tr h="365760">
-                <a:tc>
-                  <a:txBody>
-                    <a:bodyPr/>
-                    <a:lstStyle/>
-                    <a:p>
-                      <a:r>
-                        <a:rPr sz="1050" b="1">
-                          <a:solidFill>
-                            <a:srgbClr val="171A33"/>
-                          </a:solidFill>
-                          <a:latin typeface="Calibri"/>
-                        </a:rPr>
-                        <a:t>Identifiable person or screen region</a:t>
-                      </a:r>
-                    </a:p>
-                  </a:txBody>
-                  <a:tcPr>
-                    <a:solidFill>
-                      <a:srgbClr val="EEEDFB"/>
-                    </a:solidFill>
-                  </a:tcPr>
-                </a:tc>
-                <a:tc>
-                  <a:txBody>
-                    <a:bodyPr/>
-                    <a:lstStyle/>
-                    <a:p>
-                      <a:r>
-                        <a:rPr sz="1050" b="0">
-                          <a:solidFill>
-                            <a:srgbClr val="171A33"/>
-                          </a:solidFill>
-                          <a:latin typeface="Calibri"/>
-                        </a:rPr>
-                        <a:t>bounding box</a:t>
-                      </a:r>
-                    </a:p>
-                  </a:txBody>
-                  <a:tcPr>
-                    <a:solidFill>
-                      <a:srgbClr val="EEEDFB"/>
-                    </a:solidFill>
-                  </a:tcPr>
-                </a:tc>
-                <a:tc>
-                  <a:txBody>
-                    <a:bodyPr/>
-                    <a:lstStyle/>
-                    <a:p>
-                      <a:r>
-                        <a:rPr sz="1050" b="0">
-                          <a:solidFill>
-                            <a:srgbClr val="171A33"/>
-                          </a:solidFill>
-                          <a:latin typeface="Calibri"/>
-                        </a:rPr>
-                        <a:t>Validates redaction coverage for faces, badges and monitors in room video.</a:t>
-                      </a:r>
-                    </a:p>
-                  </a:txBody>
-                  <a:tcPr>
-                    <a:solidFill>
-                      <a:srgbClr val="EEEDFB"/>
-                    </a:solidFill>
-                  </a:tcPr>
-                </a:tc>
-              </a:tr>
-              <a:tr h="365760">
-                <a:tc>
-                  <a:txBody>
-                    <a:bodyPr/>
-                    <a:lstStyle/>
-                    <a:p>
-                      <a:r>
-                        <a:rPr sz="1050" b="1">
-                          <a:solidFill>
-                            <a:srgbClr val="171A33"/>
-                          </a:solidFill>
-                          <a:latin typeface="Calibri"/>
-                        </a:rPr>
-                        <a:t>Adverse event (bleeding, smoke)</a:t>
-                      </a:r>
-                    </a:p>
-                  </a:txBody>
-                  <a:tcPr>
-                    <a:solidFill>
-                      <a:srgbClr val="FFFFFF"/>
-                    </a:solidFill>
-                  </a:tcPr>
-                </a:tc>
-                <a:tc>
-                  <a:txBody>
-                    <a:bodyPr/>
-                    <a:lstStyle/>
-                    <a:p>
-                      <a:r>
-                        <a:rPr sz="1050" b="0">
-                          <a:solidFill>
-                            <a:srgbClr val="171A33"/>
-                          </a:solidFill>
-                          <a:latin typeface="Calibri"/>
-                        </a:rPr>
-                        <a:t>frame classification</a:t>
-                      </a:r>
-                    </a:p>
-                  </a:txBody>
-                  <a:tcPr>
-                    <a:solidFill>
-                      <a:srgbClr val="FFFFFF"/>
-                    </a:solidFill>
-                  </a:tcPr>
-                </a:tc>
-                <a:tc>
-                  <a:txBody>
-                    <a:bodyPr/>
-                    <a:lstStyle/>
-                    <a:p>
-                      <a:r>
-                        <a:rPr sz="1050" b="0">
-                          <a:solidFill>
-                            <a:srgbClr val="171A33"/>
-                          </a:solidFill>
-                          <a:latin typeface="Calibri"/>
-                        </a:rPr>
-                        <a:t>Rare-event mining and a known source of model failure.</a:t>
-                      </a:r>
-                    </a:p>
-                  </a:txBody>
-                  <a:tcPr>
-                    <a:solidFill>
-                      <a:srgbClr val="FFFFFF"/>
-                    </a:solidFill>
-                  </a:tcPr>
-                </a:tc>
-              </a:tr>
-              <a:tr h="365760">
-                <a:tc>
-                  <a:txBody>
-                    <a:bodyPr/>
-                    <a:lstStyle/>
-                    <a:p>
-                      <a:r>
-                        <a:rPr sz="1050" b="1">
-                          <a:solidFill>
-                            <a:srgbClr val="171A33"/>
-                          </a:solidFill>
-                          <a:latin typeface="Calibri"/>
-                        </a:rPr>
-                        <a:t>Theatre milestone (patient in, incision, closure, patient out)</a:t>
-                      </a:r>
-                    </a:p>
-                  </a:txBody>
-                  <a:tcPr>
-                    <a:solidFill>
-                      <a:srgbClr val="EEEDFB"/>
-                    </a:solidFill>
-                  </a:tcPr>
-                </a:tc>
-                <a:tc>
-                  <a:txBody>
-                    <a:bodyPr/>
-                    <a:lstStyle/>
-                    <a:p>
-                      <a:r>
-                        <a:rPr sz="1050" b="0">
-                          <a:solidFill>
-                            <a:srgbClr val="171A33"/>
-                          </a:solidFill>
-                          <a:latin typeface="Calibri"/>
-                        </a:rPr>
-                        <a:t>frame classification</a:t>
-                      </a:r>
-                    </a:p>
-                  </a:txBody>
-                  <a:tcPr>
-                    <a:solidFill>
-                      <a:srgbClr val="EEEDFB"/>
-                    </a:solidFill>
-                  </a:tcPr>
-                </a:tc>
-                <a:tc>
-                  <a:txBody>
-                    <a:bodyPr/>
-                    <a:lstStyle/>
-                    <a:p>
-                      <a:r>
-                        <a:rPr sz="1050" b="0">
-                          <a:solidFill>
-                            <a:srgbClr val="171A33"/>
-                          </a:solidFill>
-                          <a:latin typeface="Calibri"/>
-                        </a:rPr>
-                        <a:t>Direct input to utilisation and turnaround time reporting for trusts.</a:t>
+                        <a:t>Scope out of body frames must be excluded before any human review.</a:t>
                       </a:r>
                     </a:p>
                   </a:txBody>
@@ -7597,7 +7597,7 @@
                 </a:solidFill>
                 <a:latin typeface="Calibri"/>
               </a:rPr>
-              <a:t>Agents</a:t>
+              <a:t>Active</a:t>
             </a:r>
           </a:p>
         </p:txBody>
@@ -7636,7 +7636,7 @@
                 </a:solidFill>
                 <a:latin typeface="Calibri"/>
               </a:rPr>
-              <a:t>Run your own model as a workflow stage to pre-label and QA, so people adjudicate rather than draw.</a:t>
+              <a:t>Import predictions. Accuracy by class, site and condition. Find label errors. Know exactly what to label next.</a:t>
             </a:r>
           </a:p>
         </p:txBody>
@@ -7719,7 +7719,7 @@
                 </a:solidFill>
                 <a:latin typeface="Calibri"/>
               </a:rPr>
-              <a:t>Active</a:t>
+              <a:t>Agents</a:t>
             </a:r>
           </a:p>
         </p:txBody>
@@ -7758,7 +7758,7 @@
                 </a:solidFill>
                 <a:latin typeface="Calibri"/>
               </a:rPr>
-              <a:t>Import predictions. Accuracy by class, site and condition. Find label errors. Know exactly what to label next.</a:t>
+              <a:t>Run your own model as a workflow stage to pre-label and QA, so people adjudicate rather than draw.</a:t>
             </a:r>
           </a:p>
         </p:txBody>
@@ -7963,7 +7963,7 @@
                 </a:solidFill>
                 <a:latin typeface="Calibri"/>
               </a:rPr>
-              <a:t>Harvard/MGH: annotation time cut from days to minutes. Automotus: +20% mAP on a 35% smaller dataset with 33% lower labelling cost after curating in Encord.</a:t>
+              <a:t>Annotation time reduced from days to minutes on medical imaging; Encord holds SOC2 Type II, HIPAA and GDPR, with data staying in the customer's own bucket.</a:t>
             </a:r>
           </a:p>
         </p:txBody>
@@ -8002,7 +8002,7 @@
                 </a:solidFill>
                 <a:latin typeface="Calibri"/>
               </a:rPr>
-              <a:t>Clinical experts doing the annotation, PHI-sensitive imaging, and the same problem of expert minutes being the scarce resource. For the curation side, Automotus is the closer analogue: continuous camera streams where most frames are near duplicates.</a:t>
+              <a:t>Clinician annotators, PHI sensitive imaging, academic grade ground truth for publication, which mirrors Proximie's NHS and journal publication posture.</a:t>
             </a:r>
           </a:p>
         </p:txBody>
@@ -8381,7 +8381,7 @@
                 </a:solidFill>
                 <a:latin typeface="Calibri"/>
               </a:rPr>
-              <a:t>Week 1, day 1-2: register one de-identified procedure set (target 50-100 hours of video) from Proximie's own AWS bucket in Index. No data movement. Success: embeddings and quality metrics computed, browsable by brightness, sharpness and uniqueness.</a:t>
+              <a:t>Week 1, day 1-2: register one de-identified procedure cohort (say 200 laparoscopic cases) from their existing AWS bucket into Index. Nothing moves. Success: embeddings and quality metrics computed, out of body and degraded frames auto-flagged.</a:t>
             </a:r>
           </a:p>
         </p:txBody>
@@ -8503,7 +8503,7 @@
                 </a:solidFill>
                 <a:latin typeface="Calibri"/>
               </a:rPr>
-              <a:t>Week 1, day 3-5: build a Collection that drops out-of-body and near-duplicate frames and samples for diversity across sites and procedure types. Success: agreed target of 50-60% reduction in frames sent to clinical reviewers while retaining 95% of distinct phases.</a:t>
+              <a:t>Week 1, day 3-5: build Collections by similarity and uniqueness, then compare a curated frame set against a random set of equal size. Success metric: at least 50 percent fewer frames to label while retaining 95 percent of instrument and phase events.</a:t>
             </a:r>
           </a:p>
         </p:txBody>
@@ -8625,7 +8625,7 @@
                 </a:solidFill>
                 <a:latin typeface="Calibri"/>
               </a:rPr>
-              <a:t>Week 2, day 1-2: stand up the phase and instrument ontology in Annotate with a review workflow, and wire an Agent running Proximie's existing phase or redaction model as a pre-labelling stage. Success: measured minutes per procedure-hour for a reviewer versus their current tool.</a:t>
+              <a:t>Week 2, day 1-3: stand up the phase plus instrument ontology in Annotate with an annotate to review to complete workflow, sampled clinician review and SAM 3 plus object tracking on a 20 case pilot. Success: median minutes of surgeon time per case, versus their current baseline.</a:t>
             </a:r>
           </a:p>
         </p:txBody>
@@ -8747,7 +8747,7 @@
                 </a:solidFill>
                 <a:latin typeface="Calibri"/>
               </a:rPr>
-              <a:t>Week 2, day 3-4: import Proximie's current model predictions into Active and slice performance by phase, site and lighting metrics. Success: a named list of the three data slices driving most errors.</a:t>
+              <a:t>Week 2, day 4: run an Agents stage with their existing phase model as a pre-labeller on the same cases. Success: percentage of pre-labels accepted without edit.</a:t>
             </a:r>
           </a:p>
         </p:txBody>
@@ -8869,7 +8869,7 @@
                 </a:solidFill>
                 <a:latin typeface="Calibri"/>
               </a:rPr>
-              <a:t>Week 2, day 5: train or fine-tune on the curated pick versus a random pick of equal size and compare. Success criterion agreed up front, for example equal or better phase accuracy on half the labelled frames.</a:t>
+              <a:t>Week 2, day 5: import their model predictions into Active, produce mAP/F1 by class and confusion matrix sliced by hospital, scope and brightness. Success: a ranked list of the next 500 clips to label, plus a count of label errors found in their existing ground truth.</a:t>
             </a:r>
           </a:p>
         </p:txBody>
@@ -9126,7 +9126,7 @@
                 </a:solidFill>
                 <a:latin typeface="Calibri"/>
               </a:rPr>
-              <a:t>•  For the NHS pilot, how many hours of theatre video do you expect to need labelled, and who actually does the labelling today, clinicians, an outsourced team or Deloitte?</a:t>
+              <a:t>•  For the AWS, Deloitte and NHS evaluation, who creates the ground truth labels, and how do you currently evidence reviewer agreement and audit trail to the trusts?</a:t>
             </a:r>
           </a:p>
           <a:p>
@@ -9142,7 +9142,7 @@
                 </a:solidFill>
                 <a:latin typeface="Calibri"/>
               </a:rPr>
-              <a:t>•  What tool are your annotators in right now, and did you build it or buy it?</a:t>
+              <a:t>•  How do you decide which of the 100+ terabytes to annotate today, by procedure type, by surgeon request, or by something at frame level?</a:t>
             </a:r>
           </a:p>
           <a:p>
@@ -9158,7 +9158,7 @@
                 </a:solidFill>
                 <a:latin typeface="Calibri"/>
               </a:rPr>
-              <a:t>•  How do you currently decide which clips get labelled next, and how much of what you label turns out to be near-identical footage?</a:t>
+              <a:t>•  What does a surgeon annotator actually see, an internal viewer, a vendor tool, or something like CVAT, and how many minutes per case does it take?</a:t>
             </a:r>
           </a:p>
           <a:p>
@@ -9174,7 +9174,7 @@
                 </a:solidFill>
                 <a:latin typeface="Calibri"/>
               </a:rPr>
-              <a:t>•  When a trust challenges a utilisation number, how do you show accuracy for that site and that procedure type specifically?</a:t>
+              <a:t>•  When a phase or instrument model underperforms at a new site, how do you currently find out which slices are failing and what to label next?</a:t>
             </a:r>
           </a:p>
           <a:p>
@@ -9190,7 +9190,7 @@
                 </a:solidFill>
                 <a:latin typeface="Calibri"/>
               </a:rPr>
-              <a:t>•  Where does the de-identification step happen, on the hardware or in the cloud, and what would have to be true for a labelling platform to sit alongside your AWS environment?</a:t>
+              <a:t>•  De-identification happens on the hardware, so what are the rules for where labelled frames can be stored and who can see them, and does data need to stay in your AWS account?</a:t>
             </a:r>
           </a:p>
         </p:txBody>
